--- a/skills/overview-deck/assets/skeletons/library_ov80i.pptx
+++ b/skills/overview-deck/assets/skeletons/library_ov80i.pptx
@@ -22978,7 +22978,7 @@
                 <a:cs typeface="Montserrat SemiBold"/>
                 <a:sym typeface="Montserrat SemiBold"/>
               </a:rPr>
-              <a:t>3</a:t>
+              <a:t>25</a:t>
             </a:r>
             <a:r>
               <a:rPr b="1" i="0" lang="en" sz="4000" u="none" cap="none" strike="noStrike">
@@ -22990,7 +22990,7 @@
                 <a:cs typeface="Montserrat SemiBold"/>
                 <a:sym typeface="Montserrat SemiBold"/>
               </a:rPr>
-              <a:t>00,000 images on device.</a:t>
+              <a:t>,000 images on device.</a:t>
             </a:r>
             <a:endParaRPr b="0" i="0" sz="1867" u="none" cap="none" strike="noStrike">
               <a:solidFill>
